--- a/6_Project_success_criterion.pptx
+++ b/6_Project_success_criterion.pptx
@@ -522,7 +522,7 @@
           <p:nvPr>
             <p:extLst>
               <p:ext uri="{F5677B7D-0D2A-4D9B-9A5C-6D8D7D0E5A5D}">
-                <pptd:line xmlns:pptd="https://kimi-design.msh.team/pptd/2026" xmlns:mc="http://schemas.openxmlformats.org/markup-compatibility/2006" xmlns:m="http://schemas.openxmlformats.org/officeDocument/2006/math" xmlns:cx="http://schemas.microsoft.com/office/drawing/2014/chartex" xmlns:c="http://schemas.openxmlformats.org/drawingml/2006/chart" xmlns:a14="http://schemas.microsoft.com/office/drawing/2010/main" xmlns="" encoding="base64url">eyJ2aWV3Qm94IjpbNTIwLDFdLCJwb2ludHMiOiIwLDAgNTIwLDAifQ</pptd:line>
+                <pptd:line xmlns="" xmlns:a14="http://schemas.microsoft.com/office/drawing/2010/main" xmlns:c="http://schemas.openxmlformats.org/drawingml/2006/chart" xmlns:cx="http://schemas.microsoft.com/office/drawing/2014/chartex" xmlns:m="http://schemas.openxmlformats.org/officeDocument/2006/math" xmlns:mc="http://schemas.openxmlformats.org/markup-compatibility/2006" xmlns:pptd="https://kimi-design.msh.team/pptd/2026" encoding="base64url">eyJ2aWV3Qm94IjpbNTIwLDFdLCJwb2ludHMiOiIwLDAgNTIwLDAifQ</pptd:line>
               </p:ext>
             </p:extLst>
           </p:nvPr>
@@ -649,7 +649,7 @@
           <p:nvPr>
             <p:extLst>
               <p:ext uri="{F5677B7D-0D2A-4D9B-9A5C-6D8D7D0E5A5D}">
-                <pptd:line xmlns:pptd="https://kimi-design.msh.team/pptd/2026" xmlns:mc="http://schemas.openxmlformats.org/markup-compatibility/2006" xmlns:m="http://schemas.openxmlformats.org/officeDocument/2006/math" xmlns:cx="http://schemas.microsoft.com/office/drawing/2014/chartex" xmlns:c="http://schemas.openxmlformats.org/drawingml/2006/chart" xmlns:a14="http://schemas.microsoft.com/office/drawing/2010/main" xmlns="" encoding="base64url">eyJ2aWV3Qm94IjpbNTIwLDFdLCJwb2ludHMiOiIwLDAgNTIwLDAifQ</pptd:line>
+                <pptd:line xmlns="" xmlns:a14="http://schemas.microsoft.com/office/drawing/2010/main" xmlns:c="http://schemas.openxmlformats.org/drawingml/2006/chart" xmlns:cx="http://schemas.microsoft.com/office/drawing/2014/chartex" xmlns:m="http://schemas.openxmlformats.org/officeDocument/2006/math" xmlns:mc="http://schemas.openxmlformats.org/markup-compatibility/2006" xmlns:pptd="https://kimi-design.msh.team/pptd/2026" encoding="base64url">eyJ2aWV3Qm94IjpbNTIwLDFdLCJwb2ludHMiOiIwLDAgNTIwLDAifQ</pptd:line>
               </p:ext>
             </p:extLst>
           </p:nvPr>
@@ -776,7 +776,7 @@
           <p:nvPr>
             <p:extLst>
               <p:ext uri="{F5677B7D-0D2A-4D9B-9A5C-6D8D7D0E5A5D}">
-                <pptd:line xmlns:pptd="https://kimi-design.msh.team/pptd/2026" xmlns:mc="http://schemas.openxmlformats.org/markup-compatibility/2006" xmlns:m="http://schemas.openxmlformats.org/officeDocument/2006/math" xmlns:cx="http://schemas.microsoft.com/office/drawing/2014/chartex" xmlns:c="http://schemas.openxmlformats.org/drawingml/2006/chart" xmlns:a14="http://schemas.microsoft.com/office/drawing/2010/main" xmlns="" encoding="base64url">eyJ2aWV3Qm94IjpbNTIwLDFdLCJwb2ludHMiOiIwLDAgNTIwLDAifQ</pptd:line>
+                <pptd:line xmlns="" xmlns:a14="http://schemas.microsoft.com/office/drawing/2010/main" xmlns:c="http://schemas.openxmlformats.org/drawingml/2006/chart" xmlns:cx="http://schemas.microsoft.com/office/drawing/2014/chartex" xmlns:m="http://schemas.openxmlformats.org/officeDocument/2006/math" xmlns:mc="http://schemas.openxmlformats.org/markup-compatibility/2006" xmlns:pptd="https://kimi-design.msh.team/pptd/2026" encoding="base64url">eyJ2aWV3Qm94IjpbNTIwLDFdLCJwb2ludHMiOiIwLDAgNTIwLDAifQ</pptd:line>
               </p:ext>
             </p:extLst>
           </p:nvPr>
@@ -903,7 +903,7 @@
           <p:nvPr>
             <p:extLst>
               <p:ext uri="{F5677B7D-0D2A-4D9B-9A5C-6D8D7D0E5A5D}">
-                <pptd:line xmlns:pptd="https://kimi-design.msh.team/pptd/2026" xmlns:mc="http://schemas.openxmlformats.org/markup-compatibility/2006" xmlns:m="http://schemas.openxmlformats.org/officeDocument/2006/math" xmlns:cx="http://schemas.microsoft.com/office/drawing/2014/chartex" xmlns:c="http://schemas.openxmlformats.org/drawingml/2006/chart" xmlns:a14="http://schemas.microsoft.com/office/drawing/2010/main" xmlns="" encoding="base64url">eyJ2aWV3Qm94IjpbNTIwLDFdLCJwb2ludHMiOiIwLDAgNTIwLDAifQ</pptd:line>
+                <pptd:line xmlns="" xmlns:a14="http://schemas.microsoft.com/office/drawing/2010/main" xmlns:c="http://schemas.openxmlformats.org/drawingml/2006/chart" xmlns:cx="http://schemas.microsoft.com/office/drawing/2014/chartex" xmlns:m="http://schemas.openxmlformats.org/officeDocument/2006/math" xmlns:mc="http://schemas.openxmlformats.org/markup-compatibility/2006" xmlns:pptd="https://kimi-design.msh.team/pptd/2026" encoding="base64url">eyJ2aWV3Qm94IjpbNTIwLDFdLCJwb2ludHMiOiIwLDAgNTIwLDAifQ</pptd:line>
               </p:ext>
             </p:extLst>
           </p:nvPr>
@@ -1030,7 +1030,7 @@
           <p:nvPr>
             <p:extLst>
               <p:ext uri="{F5677B7D-0D2A-4D9B-9A5C-6D8D7D0E5A5D}">
-                <pptd:line xmlns:pptd="https://kimi-design.msh.team/pptd/2026" xmlns:mc="http://schemas.openxmlformats.org/markup-compatibility/2006" xmlns:m="http://schemas.openxmlformats.org/officeDocument/2006/math" xmlns:cx="http://schemas.microsoft.com/office/drawing/2014/chartex" xmlns:c="http://schemas.openxmlformats.org/drawingml/2006/chart" xmlns:a14="http://schemas.microsoft.com/office/drawing/2010/main" xmlns="" encoding="base64url">eyJ2aWV3Qm94IjpbNTIwLDFdLCJwb2ludHMiOiIwLDAgNTIwLDAifQ</pptd:line>
+                <pptd:line xmlns="" xmlns:a14="http://schemas.microsoft.com/office/drawing/2010/main" xmlns:c="http://schemas.openxmlformats.org/drawingml/2006/chart" xmlns:cx="http://schemas.microsoft.com/office/drawing/2014/chartex" xmlns:m="http://schemas.openxmlformats.org/officeDocument/2006/math" xmlns:mc="http://schemas.openxmlformats.org/markup-compatibility/2006" xmlns:pptd="https://kimi-design.msh.team/pptd/2026" encoding="base64url">eyJ2aWV3Qm94IjpbNTIwLDFdLCJwb2ludHMiOiIwLDAgNTIwLDAifQ</pptd:line>
               </p:ext>
             </p:extLst>
           </p:nvPr>
@@ -1157,7 +1157,7 @@
           <p:nvPr>
             <p:extLst>
               <p:ext uri="{F5677B7D-0D2A-4D9B-9A5C-6D8D7D0E5A5D}">
-                <pptd:line xmlns:pptd="https://kimi-design.msh.team/pptd/2026" xmlns:mc="http://schemas.openxmlformats.org/markup-compatibility/2006" xmlns:m="http://schemas.openxmlformats.org/officeDocument/2006/math" xmlns:cx="http://schemas.microsoft.com/office/drawing/2014/chartex" xmlns:c="http://schemas.openxmlformats.org/drawingml/2006/chart" xmlns:a14="http://schemas.microsoft.com/office/drawing/2010/main" xmlns="" encoding="base64url">eyJ2aWV3Qm94IjpbNTIwLDFdLCJwb2ludHMiOiIwLDAgNTIwLDAifQ</pptd:line>
+                <pptd:line xmlns="" xmlns:a14="http://schemas.microsoft.com/office/drawing/2010/main" xmlns:c="http://schemas.openxmlformats.org/drawingml/2006/chart" xmlns:cx="http://schemas.microsoft.com/office/drawing/2014/chartex" xmlns:m="http://schemas.openxmlformats.org/officeDocument/2006/math" xmlns:mc="http://schemas.openxmlformats.org/markup-compatibility/2006" xmlns:pptd="https://kimi-design.msh.team/pptd/2026" encoding="base64url">eyJ2aWV3Qm94IjpbNTIwLDFdLCJwb2ludHMiOiIwLDAgNTIwLDAifQ</pptd:line>
               </p:ext>
             </p:extLst>
           </p:nvPr>
@@ -1284,7 +1284,7 @@
           <p:nvPr>
             <p:extLst>
               <p:ext uri="{F5677B7D-0D2A-4D9B-9A5C-6D8D7D0E5A5D}">
-                <pptd:line xmlns:pptd="https://kimi-design.msh.team/pptd/2026" xmlns:mc="http://schemas.openxmlformats.org/markup-compatibility/2006" xmlns:m="http://schemas.openxmlformats.org/officeDocument/2006/math" xmlns:cx="http://schemas.microsoft.com/office/drawing/2014/chartex" xmlns:c="http://schemas.openxmlformats.org/drawingml/2006/chart" xmlns:a14="http://schemas.microsoft.com/office/drawing/2010/main" xmlns="" encoding="base64url">eyJ2aWV3Qm94IjpbNTIwLDFdLCJwb2ludHMiOiIwLDAgNTIwLDAifQ</pptd:line>
+                <pptd:line xmlns="" xmlns:a14="http://schemas.microsoft.com/office/drawing/2010/main" xmlns:c="http://schemas.openxmlformats.org/drawingml/2006/chart" xmlns:cx="http://schemas.microsoft.com/office/drawing/2014/chartex" xmlns:m="http://schemas.openxmlformats.org/officeDocument/2006/math" xmlns:mc="http://schemas.openxmlformats.org/markup-compatibility/2006" xmlns:pptd="https://kimi-design.msh.team/pptd/2026" encoding="base64url">eyJ2aWV3Qm94IjpbNTIwLDFdLCJwb2ludHMiOiIwLDAgNTIwLDAifQ</pptd:line>
               </p:ext>
             </p:extLst>
           </p:nvPr>
@@ -1369,7 +1369,7 @@
           <p:nvPr>
             <p:extLst>
               <p:ext uri="{F5677B7D-0D2A-4D9B-9A5C-6D8D7D0E5A5D}">
-                <pptd:line xmlns:pptd="https://kimi-design.msh.team/pptd/2026" xmlns:mc="http://schemas.openxmlformats.org/markup-compatibility/2006" xmlns:m="http://schemas.openxmlformats.org/officeDocument/2006/math" xmlns:cx="http://schemas.microsoft.com/office/drawing/2014/chartex" xmlns:c="http://schemas.openxmlformats.org/drawingml/2006/chart" xmlns:a14="http://schemas.microsoft.com/office/drawing/2010/main" xmlns="" encoding="base64url">eyJ2aWV3Qm94IjpbMSwzMjldLCJwb2ludHMiOiIwLDAgMCwzMjkifQ</pptd:line>
+                <pptd:line xmlns="" xmlns:a14="http://schemas.microsoft.com/office/drawing/2010/main" xmlns:c="http://schemas.openxmlformats.org/drawingml/2006/chart" xmlns:cx="http://schemas.microsoft.com/office/drawing/2014/chartex" xmlns:m="http://schemas.openxmlformats.org/officeDocument/2006/math" xmlns:mc="http://schemas.openxmlformats.org/markup-compatibility/2006" xmlns:pptd="https://kimi-design.msh.team/pptd/2026" encoding="base64url">eyJ2aWV3Qm94IjpbMSwzMjldLCJwb2ludHMiOiIwLDAgMCwzMjkifQ</pptd:line>
               </p:ext>
             </p:extLst>
           </p:nvPr>
@@ -1493,7 +1493,7 @@
                 <a:latin typeface="Arial"/>
                 <a:ea typeface="Arial"/>
               </a:rPr>
-              <a:t> • </a:t>
+              <a:t> </a:t>
             </a:r>
             <a:r>
               <a:rPr lang="en-US" sz="1200" b="1" noProof="1">
@@ -1591,7 +1591,7 @@
                 <a:latin typeface="Arial"/>
                 <a:ea typeface="Arial"/>
               </a:rPr>
-              <a:t>• камера и операторы — сопоставимые периоды, чередование по неделям</a:t>
+              <a:t>• камера и операторы - сопоставимые периоды, чередование по неделям</a:t>
             </a:r>
             <a:endParaRPr lang="en-US" sz="1200" noProof="1"/>
           </a:p>
